--- a/figure_pipeline/fig5_external_validation_chandrasekaran/fig5_panels/fig5_panelA.pptx
+++ b/figure_pipeline/fig5_external_validation_chandrasekaran/fig5_panels/fig5_panelA.pptx
@@ -259,7 +259,7 @@
           <a:p>
             <a:fld id="{42811C8E-6063-4129-BD22-C069975A38E6}" type="datetimeFigureOut">
               <a:rPr lang="en-US" smtClean="0"/>
-              <a:t>1/16/2026</a:t>
+              <a:t>8/23/2026</a:t>
             </a:fld>
             <a:endParaRPr lang="en-US"/>
           </a:p>
@@ -457,7 +457,7 @@
           <a:p>
             <a:fld id="{42811C8E-6063-4129-BD22-C069975A38E6}" type="datetimeFigureOut">
               <a:rPr lang="en-US" smtClean="0"/>
-              <a:t>1/16/2026</a:t>
+              <a:t>8/23/2026</a:t>
             </a:fld>
             <a:endParaRPr lang="en-US"/>
           </a:p>
@@ -665,7 +665,7 @@
           <a:p>
             <a:fld id="{42811C8E-6063-4129-BD22-C069975A38E6}" type="datetimeFigureOut">
               <a:rPr lang="en-US" smtClean="0"/>
-              <a:t>1/16/2026</a:t>
+              <a:t>8/23/2026</a:t>
             </a:fld>
             <a:endParaRPr lang="en-US"/>
           </a:p>
@@ -863,7 +863,7 @@
           <a:p>
             <a:fld id="{42811C8E-6063-4129-BD22-C069975A38E6}" type="datetimeFigureOut">
               <a:rPr lang="en-US" smtClean="0"/>
-              <a:t>1/16/2026</a:t>
+              <a:t>8/23/2026</a:t>
             </a:fld>
             <a:endParaRPr lang="en-US"/>
           </a:p>
@@ -1138,7 +1138,7 @@
           <a:p>
             <a:fld id="{42811C8E-6063-4129-BD22-C069975A38E6}" type="datetimeFigureOut">
               <a:rPr lang="en-US" smtClean="0"/>
-              <a:t>1/16/2026</a:t>
+              <a:t>8/23/2026</a:t>
             </a:fld>
             <a:endParaRPr lang="en-US"/>
           </a:p>
@@ -1403,7 +1403,7 @@
           <a:p>
             <a:fld id="{42811C8E-6063-4129-BD22-C069975A38E6}" type="datetimeFigureOut">
               <a:rPr lang="en-US" smtClean="0"/>
-              <a:t>1/16/2026</a:t>
+              <a:t>8/23/2026</a:t>
             </a:fld>
             <a:endParaRPr lang="en-US"/>
           </a:p>
@@ -1815,7 +1815,7 @@
           <a:p>
             <a:fld id="{42811C8E-6063-4129-BD22-C069975A38E6}" type="datetimeFigureOut">
               <a:rPr lang="en-US" smtClean="0"/>
-              <a:t>1/16/2026</a:t>
+              <a:t>8/23/2026</a:t>
             </a:fld>
             <a:endParaRPr lang="en-US"/>
           </a:p>
@@ -1956,7 +1956,7 @@
           <a:p>
             <a:fld id="{42811C8E-6063-4129-BD22-C069975A38E6}" type="datetimeFigureOut">
               <a:rPr lang="en-US" smtClean="0"/>
-              <a:t>1/16/2026</a:t>
+              <a:t>8/23/2026</a:t>
             </a:fld>
             <a:endParaRPr lang="en-US"/>
           </a:p>
@@ -2069,7 +2069,7 @@
           <a:p>
             <a:fld id="{42811C8E-6063-4129-BD22-C069975A38E6}" type="datetimeFigureOut">
               <a:rPr lang="en-US" smtClean="0"/>
-              <a:t>1/16/2026</a:t>
+              <a:t>8/23/2026</a:t>
             </a:fld>
             <a:endParaRPr lang="en-US"/>
           </a:p>
@@ -2380,7 +2380,7 @@
           <a:p>
             <a:fld id="{42811C8E-6063-4129-BD22-C069975A38E6}" type="datetimeFigureOut">
               <a:rPr lang="en-US" smtClean="0"/>
-              <a:t>1/16/2026</a:t>
+              <a:t>8/23/2026</a:t>
             </a:fld>
             <a:endParaRPr lang="en-US"/>
           </a:p>
@@ -2668,7 +2668,7 @@
           <a:p>
             <a:fld id="{42811C8E-6063-4129-BD22-C069975A38E6}" type="datetimeFigureOut">
               <a:rPr lang="en-US" smtClean="0"/>
-              <a:t>1/16/2026</a:t>
+              <a:t>8/23/2026</a:t>
             </a:fld>
             <a:endParaRPr lang="en-US"/>
           </a:p>
@@ -2909,7 +2909,7 @@
           <a:p>
             <a:fld id="{42811C8E-6063-4129-BD22-C069975A38E6}" type="datetimeFigureOut">
               <a:rPr lang="en-US" smtClean="0"/>
-              <a:t>1/16/2026</a:t>
+              <a:t>8/23/2026</a:t>
             </a:fld>
             <a:endParaRPr lang="en-US"/>
           </a:p>
@@ -3473,7 +3473,7 @@
               <a:pPr algn="ctr"/>
               <a:r>
                 <a:rPr lang="en-US" sz="1100" b="1" dirty="0"/>
-                <a:t>Final evaluation set – 70 drug pair instances</a:t>
+                <a:t>Final evaluation set – 34 drug pair instances</a:t>
               </a:r>
               <a:br>
                 <a:rPr lang="en-US" sz="1100" dirty="0"/>
@@ -3501,10 +3501,10 @@
           <p:nvPr/>
         </p:nvPicPr>
         <p:blipFill>
-          <a:blip r:embed="rId2">
+          <a:blip>
             <a:extLst>
               <a:ext uri="{96DAC541-7B7A-43D3-8B79-37D633B846F1}">
-                <asvg:svgBlip xmlns:asvg="http://schemas.microsoft.com/office/drawing/2016/SVG/main" r:embed="rId3"/>
+                <asvg:svgBlip xmlns:asvg="http://schemas.microsoft.com/office/drawing/2016/SVG/main" r:embed="rId2"/>
               </a:ext>
             </a:extLst>
           </a:blip>
@@ -3687,10 +3687,10 @@
                   <p:nvPr/>
                 </p:nvPicPr>
                 <p:blipFill>
-                  <a:blip r:embed="rId4">
+                  <a:blip>
                     <a:extLst>
                       <a:ext uri="{96DAC541-7B7A-43D3-8B79-37D633B846F1}">
-                        <asvg:svgBlip xmlns:asvg="http://schemas.microsoft.com/office/drawing/2016/SVG/main" r:embed="rId5"/>
+                        <asvg:svgBlip xmlns:asvg="http://schemas.microsoft.com/office/drawing/2016/SVG/main" r:embed="rId3"/>
                       </a:ext>
                     </a:extLst>
                   </a:blip>
@@ -3819,10 +3819,7 @@
                           <a:pPr/>
                           <a14:m>
                             <m:oMathPara xmlns:m="http://schemas.openxmlformats.org/officeDocument/2006/math">
-                              <m:oMathParaPr>
-                                <m:jc m:val="centerGroup"/>
-                              </m:oMathParaPr>
-                              <m:oMath xmlns:m="http://schemas.openxmlformats.org/officeDocument/2006/math">
+                              <m:oMath>
                                 <m:r>
                                   <a:rPr lang="en-US" sz="999" smtClean="0">
                                     <a:latin typeface="Cambria Math" panose="02040503050406030204" pitchFamily="18" charset="0"/>
@@ -3846,7 +3843,7 @@
                                   <m:rPr>
                                     <m:nor/>
                                   </m:rPr>
-                                  <a:rPr lang="el-GR" sz="1000" dirty="0" smtClean="0"/>
+                                  <a:rPr lang="el-GR" sz="1000" i="0" dirty="0" smtClean="0"/>
                                   <m:t>α</m:t>
                                 </m:r>
                                 <m:r>
@@ -4072,15 +4069,12 @@
                       <a:pPr/>
                       <a14:m>
                         <m:oMathPara xmlns:m="http://schemas.openxmlformats.org/officeDocument/2006/math">
-                          <m:oMathParaPr>
-                            <m:jc m:val="centerGroup"/>
-                          </m:oMathParaPr>
-                          <m:oMath xmlns:m="http://schemas.openxmlformats.org/officeDocument/2006/math">
+                          <m:oMath>
                             <m:r>
                               <m:rPr>
                                 <m:nor/>
                               </m:rPr>
-                              <a:rPr lang="el-GR" sz="1000" dirty="0" smtClean="0"/>
+                              <a:rPr lang="el-GR" sz="1000" i="0" dirty="0" smtClean="0"/>
                               <m:t>α</m:t>
                             </m:r>
                             <m:r>
@@ -4175,15 +4169,12 @@
                       <a:pPr/>
                       <a14:m>
                         <m:oMathPara xmlns:m="http://schemas.openxmlformats.org/officeDocument/2006/math">
-                          <m:oMathParaPr>
-                            <m:jc m:val="centerGroup"/>
-                          </m:oMathParaPr>
-                          <m:oMath xmlns:m="http://schemas.openxmlformats.org/officeDocument/2006/math">
+                          <m:oMath>
                             <m:r>
                               <m:rPr>
                                 <m:nor/>
                               </m:rPr>
-                              <a:rPr lang="el-GR" sz="1000" dirty="0" smtClean="0"/>
+                              <a:rPr lang="el-GR" sz="1000" i="0" dirty="0" smtClean="0"/>
                               <m:t>α</m:t>
                             </m:r>
                             <m:r>
@@ -15622,73 +15613,6 @@
       </p:grpSp>
       <p:sp>
         <p:nvSpPr>
-          <p:cNvPr id="48" name="TextBox 47">
-            <a:extLst>
-              <a:ext uri="{FF2B5EF4-FFF2-40B4-BE49-F238E27FC236}">
-                <a16:creationId xmlns:a16="http://schemas.microsoft.com/office/drawing/2014/main" id="{DF76227D-5472-FF88-B33A-B9A9B5C868D7}"/>
-              </a:ext>
-            </a:extLst>
-          </p:cNvPr>
-          <p:cNvSpPr txBox="1"/>
-          <p:nvPr/>
-        </p:nvSpPr>
-        <p:spPr>
-          <a:xfrm>
-            <a:off x="2973760" y="1087220"/>
-            <a:ext cx="2615697" cy="600164"/>
-          </a:xfrm>
-          <a:prstGeom prst="rect">
-            <a:avLst/>
-          </a:prstGeom>
-          <a:noFill/>
-          <a:ln>
-            <a:noFill/>
-          </a:ln>
-        </p:spPr>
-        <p:txBody>
-          <a:bodyPr wrap="square" rtlCol="0">
-            <a:spAutoFit/>
-          </a:bodyPr>
-          <a:lstStyle/>
-          <a:p>
-            <a:pPr marL="285793" indent="-285793">
-              <a:buFont typeface="Arial" panose="020B0604020202020204" pitchFamily="34" charset="0"/>
-              <a:buChar char="•"/>
-            </a:pPr>
-            <a:r>
-              <a:rPr lang="en-US" sz="1100" dirty="0" err="1"/>
-              <a:t>Inchikey</a:t>
-            </a:r>
-            <a:r>
-              <a:rPr lang="en-US" sz="1100" dirty="0"/>
-              <a:t> mapping</a:t>
-            </a:r>
-          </a:p>
-          <a:p>
-            <a:pPr marL="285793" indent="-285793">
-              <a:buFont typeface="Arial" panose="020B0604020202020204" pitchFamily="34" charset="0"/>
-              <a:buChar char="•"/>
-            </a:pPr>
-            <a:r>
-              <a:rPr lang="en-US" sz="1100" dirty="0"/>
-              <a:t>Filter to approved antibacterials</a:t>
-            </a:r>
-          </a:p>
-          <a:p>
-            <a:pPr marL="285793" indent="-285793">
-              <a:buFont typeface="Arial" panose="020B0604020202020204" pitchFamily="34" charset="0"/>
-              <a:buChar char="•"/>
-            </a:pPr>
-            <a:r>
-              <a:rPr lang="en-US" sz="1100" dirty="0"/>
-              <a:t>Exclude non-antibacterial compounds</a:t>
-            </a:r>
-            <a:endParaRPr lang="en-US" sz="900" dirty="0"/>
-          </a:p>
-        </p:txBody>
-      </p:sp>
-      <p:sp>
-        <p:nvSpPr>
           <p:cNvPr id="16" name="TextBox 15">
             <a:extLst>
               <a:ext uri="{FF2B5EF4-FFF2-40B4-BE49-F238E27FC236}">
@@ -15884,10 +15808,10 @@
           <p:nvPr/>
         </p:nvPicPr>
         <p:blipFill>
-          <a:blip r:embed="rId9">
+          <a:blip>
             <a:extLst>
               <a:ext uri="{96DAC541-7B7A-43D3-8B79-37D633B846F1}">
-                <asvg:svgBlip xmlns:asvg="http://schemas.microsoft.com/office/drawing/2016/SVG/main" r:embed="rId10"/>
+                <asvg:svgBlip xmlns:asvg="http://schemas.microsoft.com/office/drawing/2016/SVG/main" r:embed="rId9"/>
               </a:ext>
             </a:extLst>
           </a:blip>
@@ -16049,6 +15973,83 @@
           <a:p>
             <a:pPr algn="ctr"/>
             <a:endParaRPr lang="en-US" sz="1373"/>
+          </a:p>
+        </p:txBody>
+      </p:sp>
+      <p:sp>
+        <p:nvSpPr>
+          <p:cNvPr id="3" name="TextBox 2">
+            <a:extLst>
+              <a:ext uri="{FF2B5EF4-FFF2-40B4-BE49-F238E27FC236}">
+                <a16:creationId xmlns:a16="http://schemas.microsoft.com/office/drawing/2014/main" id="{223875C3-2AD1-EDCC-82B5-27552A61CB4F}"/>
+              </a:ext>
+            </a:extLst>
+          </p:cNvPr>
+          <p:cNvSpPr txBox="1"/>
+          <p:nvPr/>
+        </p:nvSpPr>
+        <p:spPr>
+          <a:xfrm>
+            <a:off x="2965180" y="1010862"/>
+            <a:ext cx="2723928" cy="769441"/>
+          </a:xfrm>
+          <a:prstGeom prst="rect">
+            <a:avLst/>
+          </a:prstGeom>
+          <a:noFill/>
+          <a:ln>
+            <a:noFill/>
+          </a:ln>
+        </p:spPr>
+        <p:txBody>
+          <a:bodyPr wrap="square" rtlCol="0">
+            <a:spAutoFit/>
+          </a:bodyPr>
+          <a:lstStyle/>
+          <a:p>
+            <a:pPr marL="285793" indent="-285793">
+              <a:buFont typeface="Arial" panose="020B0604020202020204" pitchFamily="34" charset="0"/>
+              <a:buChar char="•"/>
+            </a:pPr>
+            <a:r>
+              <a:rPr lang="en-US" sz="1100" dirty="0" err="1"/>
+              <a:t>Inchikey</a:t>
+            </a:r>
+            <a:r>
+              <a:rPr lang="en-US" sz="1100" dirty="0"/>
+              <a:t> mapping</a:t>
+            </a:r>
+          </a:p>
+          <a:p>
+            <a:pPr marL="285793" indent="-285793">
+              <a:buFont typeface="Arial" panose="020B0604020202020204" pitchFamily="34" charset="0"/>
+              <a:buChar char="•"/>
+            </a:pPr>
+            <a:r>
+              <a:rPr lang="en-US" sz="1100" dirty="0"/>
+              <a:t>Filter to approved antibacterials</a:t>
+            </a:r>
+          </a:p>
+          <a:p>
+            <a:pPr marL="285793" indent="-285793">
+              <a:buFont typeface="Arial" panose="020B0604020202020204" pitchFamily="34" charset="0"/>
+              <a:buChar char="•"/>
+            </a:pPr>
+            <a:r>
+              <a:rPr lang="en-US" sz="1100" dirty="0"/>
+              <a:t>Exclude non-antibacterial compounds</a:t>
+            </a:r>
+          </a:p>
+          <a:p>
+            <a:pPr marL="285793" indent="-285793">
+              <a:buFont typeface="Arial" panose="020B0604020202020204" pitchFamily="34" charset="0"/>
+              <a:buChar char="•"/>
+            </a:pPr>
+            <a:r>
+              <a:rPr lang="en-US" sz="1100" dirty="0"/>
+              <a:t>Remove overlapping pairs with HALO’s</a:t>
+            </a:r>
+            <a:endParaRPr lang="en-US" sz="900" dirty="0"/>
           </a:p>
         </p:txBody>
       </p:sp>
